--- a/docs/img/mujoco.pptx
+++ b/docs/img/mujoco.pptx
@@ -10,36 +10,37 @@
   </p:notesMasterIdLst>
   <p:sldIdLst>
     <p:sldId id="309" r:id="rId4"/>
+    <p:sldId id="310" r:id="rId6"/>
   </p:sldIdLst>
   <p:sldSz cx="9144000" cy="5143500" type="screen16x9"/>
   <p:notesSz cx="9144000" cy="5143500"/>
   <p:embeddedFontLst>
     <p:embeddedFont>
       <p:font typeface="Economica" panose="02000506040000020004"/>
-      <p:regular r:id="rId9"/>
+      <p:regular r:id="rId10"/>
     </p:embeddedFont>
     <p:embeddedFont>
       <p:font typeface="Open Sans" panose="020B0606030504020204"/>
-      <p:regular r:id="rId10"/>
+      <p:regular r:id="rId11"/>
     </p:embeddedFont>
     <p:embeddedFont>
       <p:font typeface="Muli Regular"/>
-      <p:regular r:id="rId11"/>
-      <p:italic r:id="rId12"/>
+      <p:regular r:id="rId12"/>
+      <p:italic r:id="rId13"/>
     </p:embeddedFont>
     <p:embeddedFont>
       <p:font typeface="微软雅黑" panose="020B0503020204020204" charset="-122"/>
-      <p:regular r:id="rId13"/>
+      <p:regular r:id="rId14"/>
     </p:embeddedFont>
     <p:embeddedFont>
       <p:font typeface="等线" panose="02010600030101010101" charset="-122"/>
-      <p:regular r:id="rId14"/>
+      <p:regular r:id="rId15"/>
     </p:embeddedFont>
     <p:embeddedFont>
       <p:font typeface="Muli"/>
-      <p:regular r:id="rId15"/>
-      <p:bold r:id="rId16"/>
-      <p:italic r:id="rId17"/>
+      <p:regular r:id="rId16"/>
+      <p:bold r:id="rId17"/>
+      <p:italic r:id="rId18"/>
     </p:embeddedFont>
   </p:embeddedFontLst>
   <p:defaultTextStyle>
@@ -274,12 +275,12 @@
   <p:extLst>
     <p:ext uri="{EFAFB233-063F-42B5-8137-9DF3F51BA10A}">
       <p15:sldGuideLst xmlns:p15="http://schemas.microsoft.com/office/powerpoint/2012/main">
-        <p15:guide id="1" orient="horz" pos="2902" userDrawn="1">
+        <p15:guide id="1" orient="horz" pos="2939" userDrawn="1">
           <p15:clr>
             <a:srgbClr val="A4A3A4"/>
           </p15:clr>
         </p15:guide>
-        <p15:guide id="2" pos="2100" userDrawn="1">
+        <p15:guide id="2" pos="2036" userDrawn="1">
           <p15:clr>
             <a:srgbClr val="A4A3A4"/>
           </p15:clr>
@@ -933,6 +934,149 @@
               <a:ea typeface="Muli"/>
               <a:cs typeface="Muli"/>
               <a:sym typeface="Muli"/>
+            </a:endParaRPr>
+          </a:p>
+        </p:txBody>
+      </p:sp>
+      <p:sp>
+        <p:nvSpPr>
+          <p:cNvPr id="90" name="Google Shape;90;g80294dfa11_0_4:notes"/>
+          <p:cNvSpPr>
+            <a:spLocks noGrp="1" noRot="1" noChangeAspect="1"/>
+          </p:cNvSpPr>
+          <p:nvPr>
+            <p:ph type="sldImg" idx="2"/>
+          </p:nvPr>
+        </p:nvSpPr>
+        <p:spPr>
+          <a:xfrm>
+            <a:off x="2857500" y="385763"/>
+            <a:ext cx="3429000" cy="1928812"/>
+          </a:xfrm>
+          <a:custGeom>
+            <a:avLst/>
+            <a:gdLst/>
+            <a:ahLst/>
+            <a:cxnLst/>
+            <a:rect l="l" t="t" r="r" b="b"/>
+            <a:pathLst>
+              <a:path w="120000" h="120000" extrusionOk="0">
+                <a:moveTo>
+                  <a:pt x="0" y="0"/>
+                </a:moveTo>
+                <a:lnTo>
+                  <a:pt x="120000" y="0"/>
+                </a:lnTo>
+                <a:lnTo>
+                  <a:pt x="120000" y="120000"/>
+                </a:lnTo>
+                <a:lnTo>
+                  <a:pt x="0" y="120000"/>
+                </a:lnTo>
+                <a:close/>
+              </a:path>
+            </a:pathLst>
+          </a:custGeom>
+          <a:noFill/>
+          <a:ln w="9525" cap="flat" cmpd="sng">
+            <a:solidFill>
+              <a:srgbClr val="000000"/>
+            </a:solidFill>
+            <a:prstDash val="solid"/>
+            <a:round/>
+            <a:headEnd type="none" w="sm" len="sm"/>
+            <a:tailEnd type="none" w="sm" len="sm"/>
+          </a:ln>
+        </p:spPr>
+      </p:sp>
+    </p:spTree>
+  </p:cSld>
+  <p:clrMapOvr>
+    <a:masterClrMapping/>
+  </p:clrMapOvr>
+</p:notes>
+</file>
+
+<file path=ppt/notesSlides/notesSlide2.xml><?xml version="1.0" encoding="utf-8"?>
+<p:notes xmlns:a="http://schemas.openxmlformats.org/drawingml/2006/main" xmlns:r="http://schemas.openxmlformats.org/officeDocument/2006/relationships" xmlns:p="http://schemas.openxmlformats.org/presentationml/2006/main" showMasterPhAnim="0" showMasterSp="0">
+  <p:cSld>
+    <p:spTree>
+      <p:nvGrpSpPr>
+        <p:cNvPr id="1" name="Shape 88"/>
+        <p:cNvGrpSpPr/>
+        <p:nvPr/>
+      </p:nvGrpSpPr>
+      <p:grpSpPr>
+        <a:xfrm>
+          <a:off x="0" y="0"/>
+          <a:ext cx="0" cy="0"/>
+          <a:chOff x="0" y="0"/>
+          <a:chExt cx="0" cy="0"/>
+        </a:xfrm>
+      </p:grpSpPr>
+      <p:sp>
+        <p:nvSpPr>
+          <p:cNvPr id="89" name="Google Shape;89;g80294dfa11_0_4:notes"/>
+          <p:cNvSpPr txBox="1">
+            <a:spLocks noGrp="1"/>
+          </p:cNvSpPr>
+          <p:nvPr>
+            <p:ph type="body" idx="1"/>
+          </p:nvPr>
+        </p:nvSpPr>
+        <p:spPr>
+          <a:xfrm>
+            <a:off x="914400" y="2443150"/>
+            <a:ext cx="7315200" cy="2314500"/>
+          </a:xfrm>
+          <a:prstGeom prst="rect">
+            <a:avLst/>
+          </a:prstGeom>
+          <a:noFill/>
+          <a:ln>
+            <a:noFill/>
+          </a:ln>
+        </p:spPr>
+        <p:txBody>
+          <a:bodyPr spcFirstLastPara="1" wrap="square" lIns="91425" tIns="91425" rIns="91425" bIns="91425" anchor="t" anchorCtr="0">
+            <a:noAutofit/>
+          </a:bodyPr>
+          <a:lstStyle/>
+          <a:p>
+            <a:pPr marL="0" lvl="0" indent="0" algn="l" rtl="0">
+              <a:spcBef>
+                <a:spcPts val="0"/>
+              </a:spcBef>
+              <a:spcAft>
+                <a:spcPts val="0"/>
+              </a:spcAft>
+              <a:buClr>
+                <a:schemeClr val="dk1"/>
+              </a:buClr>
+              <a:buSzPts val="1100"/>
+              <a:buFont typeface="Arial" panose="020B0604020202020204"/>
+              <a:buNone/>
+            </a:pPr>
+            <a:r>
+              <a:rPr lang="en-US" altLang="zh-CN">
+                <a:solidFill>
+                  <a:srgbClr val="39373D"/>
+                </a:solidFill>
+              </a:rPr>
+              <a:t>underwater/</a:t>
+            </a:r>
+            <a:r>
+              <a:rPr lang="en-US">
+                <a:solidFill>
+                  <a:srgbClr val="39373D"/>
+                </a:solidFill>
+              </a:rPr>
+              <a:t>HoloOcean_ROS.jpg</a:t>
+            </a:r>
+            <a:endParaRPr lang="en-US">
+              <a:solidFill>
+                <a:srgbClr val="39373D"/>
+              </a:solidFill>
             </a:endParaRPr>
           </a:p>
         </p:txBody>
@@ -31979,6 +32123,2155 @@
 </p:sld>
 </file>
 
+<file path=ppt/slides/slide2.xml><?xml version="1.0" encoding="utf-8"?>
+<p:sld xmlns:a="http://schemas.openxmlformats.org/drawingml/2006/main" xmlns:r="http://schemas.openxmlformats.org/officeDocument/2006/relationships" xmlns:p="http://schemas.openxmlformats.org/presentationml/2006/main">
+  <p:cSld>
+    <p:spTree>
+      <p:nvGrpSpPr>
+        <p:cNvPr id="1" name="Shape 91"/>
+        <p:cNvGrpSpPr/>
+        <p:nvPr/>
+      </p:nvGrpSpPr>
+      <p:grpSpPr>
+        <a:xfrm>
+          <a:off x="0" y="0"/>
+          <a:ext cx="0" cy="0"/>
+          <a:chOff x="0" y="0"/>
+          <a:chExt cx="0" cy="0"/>
+        </a:xfrm>
+      </p:grpSpPr>
+      <p:sp>
+        <p:nvSpPr>
+          <p:cNvPr id="46" name="圆角矩形 45"/>
+          <p:cNvSpPr/>
+          <p:nvPr/>
+        </p:nvSpPr>
+        <p:spPr>
+          <a:xfrm>
+            <a:off x="657860" y="731520"/>
+            <a:ext cx="2223135" cy="4080510"/>
+          </a:xfrm>
+          <a:prstGeom prst="roundRect">
+            <a:avLst>
+              <a:gd name="adj" fmla="val 8967"/>
+            </a:avLst>
+          </a:prstGeom>
+          <a:solidFill>
+            <a:srgbClr val="FFF2CC"/>
+          </a:solidFill>
+          <a:ln>
+            <a:solidFill>
+              <a:schemeClr val="bg1"/>
+            </a:solidFill>
+          </a:ln>
+        </p:spPr>
+        <p:style>
+          <a:lnRef idx="2">
+            <a:schemeClr val="accent1">
+              <a:shade val="50000"/>
+            </a:schemeClr>
+          </a:lnRef>
+          <a:fillRef idx="1">
+            <a:schemeClr val="accent1"/>
+          </a:fillRef>
+          <a:effectRef idx="0">
+            <a:schemeClr val="accent1"/>
+          </a:effectRef>
+          <a:fontRef idx="minor">
+            <a:schemeClr val="lt1"/>
+          </a:fontRef>
+        </p:style>
+        <p:txBody>
+          <a:bodyPr rtlCol="0" anchor="ctr"/>
+          <a:lstStyle/>
+          <a:p>
+            <a:pPr algn="ctr"/>
+            <a:endParaRPr lang="zh-CN" altLang="en-US" b="1">
+              <a:solidFill>
+                <a:schemeClr val="tx1"/>
+              </a:solidFill>
+            </a:endParaRPr>
+          </a:p>
+        </p:txBody>
+      </p:sp>
+      <p:sp>
+        <p:nvSpPr>
+          <p:cNvPr id="47" name="圆角矩形 46"/>
+          <p:cNvSpPr/>
+          <p:nvPr/>
+        </p:nvSpPr>
+        <p:spPr>
+          <a:xfrm>
+            <a:off x="1131360" y="1236919"/>
+            <a:ext cx="1275963" cy="354431"/>
+          </a:xfrm>
+          <a:prstGeom prst="roundRect">
+            <a:avLst/>
+          </a:prstGeom>
+          <a:solidFill>
+            <a:srgbClr val="FFF2CC"/>
+          </a:solidFill>
+          <a:ln>
+            <a:solidFill>
+              <a:schemeClr val="bg1">
+                <a:lumMod val="50000"/>
+              </a:schemeClr>
+            </a:solidFill>
+          </a:ln>
+        </p:spPr>
+        <p:style>
+          <a:lnRef idx="2">
+            <a:schemeClr val="accent1">
+              <a:shade val="50000"/>
+            </a:schemeClr>
+          </a:lnRef>
+          <a:fillRef idx="1">
+            <a:schemeClr val="accent1"/>
+          </a:fillRef>
+          <a:effectRef idx="0">
+            <a:schemeClr val="accent1"/>
+          </a:effectRef>
+          <a:fontRef idx="minor">
+            <a:schemeClr val="lt1"/>
+          </a:fontRef>
+        </p:style>
+        <p:txBody>
+          <a:bodyPr rtlCol="0" anchor="ctr"/>
+          <a:lstStyle/>
+          <a:p>
+            <a:pPr algn="ctr"/>
+            <a:r>
+              <a:rPr lang="zh-CN" altLang="en-US" b="1">
+                <a:solidFill>
+                  <a:schemeClr val="tx1"/>
+                </a:solidFill>
+              </a:rPr>
+              <a:t>代理更新</a:t>
+            </a:r>
+            <a:endParaRPr lang="zh-CN" altLang="en-US" b="1">
+              <a:solidFill>
+                <a:schemeClr val="tx1"/>
+              </a:solidFill>
+            </a:endParaRPr>
+          </a:p>
+        </p:txBody>
+      </p:sp>
+      <p:sp>
+        <p:nvSpPr>
+          <p:cNvPr id="35" name="文本框 34"/>
+          <p:cNvSpPr txBox="1"/>
+          <p:nvPr/>
+        </p:nvSpPr>
+        <p:spPr>
+          <a:xfrm>
+            <a:off x="1104050" y="370723"/>
+            <a:ext cx="1393717" cy="337185"/>
+          </a:xfrm>
+          <a:prstGeom prst="rect">
+            <a:avLst/>
+          </a:prstGeom>
+          <a:noFill/>
+        </p:spPr>
+        <p:txBody>
+          <a:bodyPr wrap="square" rtlCol="0">
+            <a:spAutoFit/>
+          </a:bodyPr>
+          <a:lstStyle/>
+          <a:p>
+            <a:pPr algn="ctr"/>
+            <a:r>
+              <a:rPr lang="en-US" altLang="zh-CN" sz="1600" b="1" dirty="0">
+                <a:solidFill>
+                  <a:schemeClr val="tx1"/>
+                </a:solidFill>
+              </a:rPr>
+              <a:t>C++ </a:t>
+            </a:r>
+            <a:r>
+              <a:rPr lang="zh-CN" altLang="en-US" sz="1600" b="1" dirty="0">
+                <a:solidFill>
+                  <a:schemeClr val="tx1"/>
+                </a:solidFill>
+                <a:ea typeface="宋体" panose="02010600030101010101" pitchFamily="2" charset="-122"/>
+              </a:rPr>
+              <a:t>引擎</a:t>
+            </a:r>
+            <a:endParaRPr lang="zh-CN" altLang="en-US" sz="1600" b="1" dirty="0">
+              <a:solidFill>
+                <a:schemeClr val="tx1"/>
+              </a:solidFill>
+              <a:ea typeface="宋体" panose="02010600030101010101" pitchFamily="2" charset="-122"/>
+            </a:endParaRPr>
+          </a:p>
+        </p:txBody>
+      </p:sp>
+      <p:cxnSp>
+        <p:nvCxnSpPr>
+          <p:cNvPr id="11" name="直接箭头连接符 10"/>
+          <p:cNvCxnSpPr>
+            <a:endCxn id="4" idx="0"/>
+          </p:cNvCxnSpPr>
+          <p:nvPr/>
+        </p:nvCxnSpPr>
+        <p:spPr>
+          <a:xfrm>
+            <a:off x="1769148" y="1591300"/>
+            <a:ext cx="0" cy="392430"/>
+          </a:xfrm>
+          <a:prstGeom prst="straightConnector1">
+            <a:avLst/>
+          </a:prstGeom>
+          <a:ln w="19050">
+            <a:solidFill>
+              <a:srgbClr val="10739E"/>
+            </a:solidFill>
+            <a:tailEnd type="triangle"/>
+          </a:ln>
+        </p:spPr>
+        <p:style>
+          <a:lnRef idx="1">
+            <a:schemeClr val="accent1"/>
+          </a:lnRef>
+          <a:fillRef idx="0">
+            <a:schemeClr val="accent1"/>
+          </a:fillRef>
+          <a:effectRef idx="0">
+            <a:schemeClr val="accent1"/>
+          </a:effectRef>
+          <a:fontRef idx="minor">
+            <a:schemeClr val="tx1"/>
+          </a:fontRef>
+        </p:style>
+      </p:cxnSp>
+      <p:sp>
+        <p:nvSpPr>
+          <p:cNvPr id="4" name="圆角矩形 3"/>
+          <p:cNvSpPr/>
+          <p:nvPr/>
+        </p:nvSpPr>
+        <p:spPr>
+          <a:xfrm>
+            <a:off x="1131360" y="1983679"/>
+            <a:ext cx="1275963" cy="354431"/>
+          </a:xfrm>
+          <a:prstGeom prst="roundRect">
+            <a:avLst/>
+          </a:prstGeom>
+          <a:solidFill>
+            <a:srgbClr val="FFF2CC"/>
+          </a:solidFill>
+          <a:ln w="25400" cap="flat" cmpd="sng">
+            <a:solidFill>
+              <a:schemeClr val="bg1">
+                <a:lumMod val="50000"/>
+              </a:schemeClr>
+            </a:solidFill>
+            <a:prstDash val="solid"/>
+            <a:round/>
+          </a:ln>
+        </p:spPr>
+        <p:style>
+          <a:lnRef idx="2">
+            <a:schemeClr val="accent1">
+              <a:shade val="50000"/>
+            </a:schemeClr>
+          </a:lnRef>
+          <a:fillRef idx="1">
+            <a:schemeClr val="accent1"/>
+          </a:fillRef>
+          <a:effectRef idx="0">
+            <a:schemeClr val="accent1"/>
+          </a:effectRef>
+          <a:fontRef idx="minor">
+            <a:schemeClr val="lt1"/>
+          </a:fontRef>
+        </p:style>
+        <p:txBody>
+          <a:bodyPr rtlCol="0" anchor="ctr"/>
+          <a:lstStyle/>
+          <a:p>
+            <a:pPr algn="ctr"/>
+            <a:r>
+              <a:rPr lang="zh-CN" altLang="en-US" b="1">
+                <a:solidFill>
+                  <a:schemeClr val="tx1"/>
+                </a:solidFill>
+              </a:rPr>
+              <a:t>加速度集成</a:t>
+            </a:r>
+            <a:endParaRPr lang="zh-CN" altLang="en-US" b="1">
+              <a:solidFill>
+                <a:schemeClr val="tx1"/>
+              </a:solidFill>
+            </a:endParaRPr>
+          </a:p>
+        </p:txBody>
+      </p:sp>
+      <p:sp>
+        <p:nvSpPr>
+          <p:cNvPr id="5" name="圆角矩形 4"/>
+          <p:cNvSpPr/>
+          <p:nvPr/>
+        </p:nvSpPr>
+        <p:spPr>
+          <a:xfrm>
+            <a:off x="1131360" y="2730439"/>
+            <a:ext cx="1275963" cy="354431"/>
+          </a:xfrm>
+          <a:prstGeom prst="roundRect">
+            <a:avLst/>
+          </a:prstGeom>
+          <a:solidFill>
+            <a:srgbClr val="FFF2CC"/>
+          </a:solidFill>
+          <a:ln w="25400" cap="flat" cmpd="sng">
+            <a:solidFill>
+              <a:schemeClr val="bg1">
+                <a:lumMod val="50000"/>
+              </a:schemeClr>
+            </a:solidFill>
+            <a:prstDash val="solid"/>
+            <a:round/>
+          </a:ln>
+        </p:spPr>
+        <p:style>
+          <a:lnRef idx="2">
+            <a:schemeClr val="accent1">
+              <a:shade val="50000"/>
+            </a:schemeClr>
+          </a:lnRef>
+          <a:fillRef idx="1">
+            <a:schemeClr val="accent1"/>
+          </a:fillRef>
+          <a:effectRef idx="0">
+            <a:schemeClr val="accent1"/>
+          </a:effectRef>
+          <a:fontRef idx="minor">
+            <a:schemeClr val="lt1"/>
+          </a:fontRef>
+        </p:style>
+        <p:txBody>
+          <a:bodyPr rtlCol="0" anchor="ctr"/>
+          <a:lstStyle/>
+          <a:p>
+            <a:pPr algn="ctr"/>
+            <a:r>
+              <a:rPr lang="zh-CN" altLang="en-US" b="1">
+                <a:solidFill>
+                  <a:schemeClr val="tx1"/>
+                </a:solidFill>
+              </a:rPr>
+              <a:t>碰撞和浮力</a:t>
+            </a:r>
+            <a:endParaRPr lang="zh-CN" altLang="en-US" b="1">
+              <a:solidFill>
+                <a:schemeClr val="tx1"/>
+              </a:solidFill>
+            </a:endParaRPr>
+          </a:p>
+        </p:txBody>
+      </p:sp>
+      <p:sp>
+        <p:nvSpPr>
+          <p:cNvPr id="10" name="圆角矩形 9"/>
+          <p:cNvSpPr/>
+          <p:nvPr/>
+        </p:nvSpPr>
+        <p:spPr>
+          <a:xfrm>
+            <a:off x="1131360" y="3477199"/>
+            <a:ext cx="1275963" cy="354431"/>
+          </a:xfrm>
+          <a:prstGeom prst="roundRect">
+            <a:avLst/>
+          </a:prstGeom>
+          <a:solidFill>
+            <a:srgbClr val="FFF2CC"/>
+          </a:solidFill>
+          <a:ln w="25400" cap="flat" cmpd="sng">
+            <a:solidFill>
+              <a:schemeClr val="bg1">
+                <a:lumMod val="50000"/>
+              </a:schemeClr>
+            </a:solidFill>
+            <a:prstDash val="solid"/>
+            <a:round/>
+          </a:ln>
+        </p:spPr>
+        <p:style>
+          <a:lnRef idx="2">
+            <a:schemeClr val="accent1">
+              <a:shade val="50000"/>
+            </a:schemeClr>
+          </a:lnRef>
+          <a:fillRef idx="1">
+            <a:schemeClr val="accent1"/>
+          </a:fillRef>
+          <a:effectRef idx="0">
+            <a:schemeClr val="accent1"/>
+          </a:effectRef>
+          <a:fontRef idx="minor">
+            <a:schemeClr val="lt1"/>
+          </a:fontRef>
+        </p:style>
+        <p:txBody>
+          <a:bodyPr rtlCol="0" anchor="ctr"/>
+          <a:lstStyle/>
+          <a:p>
+            <a:pPr algn="ctr"/>
+            <a:r>
+              <a:rPr lang="zh-CN" altLang="en-US" b="1">
+                <a:solidFill>
+                  <a:schemeClr val="tx1"/>
+                </a:solidFill>
+              </a:rPr>
+              <a:t>引擎节拍</a:t>
+            </a:r>
+            <a:endParaRPr lang="zh-CN" altLang="en-US" b="1">
+              <a:solidFill>
+                <a:schemeClr val="tx1"/>
+              </a:solidFill>
+            </a:endParaRPr>
+          </a:p>
+        </p:txBody>
+      </p:sp>
+      <p:sp>
+        <p:nvSpPr>
+          <p:cNvPr id="13" name="文本框 12"/>
+          <p:cNvSpPr txBox="1"/>
+          <p:nvPr/>
+        </p:nvSpPr>
+        <p:spPr>
+          <a:xfrm>
+            <a:off x="1069125" y="832368"/>
+            <a:ext cx="1393717" cy="306705"/>
+          </a:xfrm>
+          <a:prstGeom prst="rect">
+            <a:avLst/>
+          </a:prstGeom>
+          <a:noFill/>
+        </p:spPr>
+        <p:txBody>
+          <a:bodyPr wrap="square" rtlCol="0">
+            <a:spAutoFit/>
+          </a:bodyPr>
+          <a:lstStyle/>
+          <a:p>
+            <a:pPr algn="ctr"/>
+            <a:r>
+              <a:rPr lang="en-US" b="1" dirty="0">
+                <a:solidFill>
+                  <a:srgbClr val="C00000"/>
+                </a:solidFill>
+              </a:rPr>
+              <a:t>HoloOcean</a:t>
+            </a:r>
+            <a:endParaRPr lang="en-US" b="1" dirty="0">
+              <a:solidFill>
+                <a:srgbClr val="C00000"/>
+              </a:solidFill>
+              <a:ea typeface="宋体" panose="02010600030101010101" pitchFamily="2" charset="-122"/>
+            </a:endParaRPr>
+          </a:p>
+        </p:txBody>
+      </p:sp>
+      <p:cxnSp>
+        <p:nvCxnSpPr>
+          <p:cNvPr id="15" name="直接箭头连接符 14"/>
+          <p:cNvCxnSpPr/>
+          <p:nvPr/>
+        </p:nvCxnSpPr>
+        <p:spPr>
+          <a:xfrm>
+            <a:off x="1769148" y="2338060"/>
+            <a:ext cx="0" cy="392430"/>
+          </a:xfrm>
+          <a:prstGeom prst="straightConnector1">
+            <a:avLst/>
+          </a:prstGeom>
+          <a:ln w="19050">
+            <a:solidFill>
+              <a:srgbClr val="10739E"/>
+            </a:solidFill>
+            <a:tailEnd type="triangle"/>
+          </a:ln>
+        </p:spPr>
+        <p:style>
+          <a:lnRef idx="1">
+            <a:schemeClr val="accent1"/>
+          </a:lnRef>
+          <a:fillRef idx="0">
+            <a:schemeClr val="accent1"/>
+          </a:fillRef>
+          <a:effectRef idx="0">
+            <a:schemeClr val="accent1"/>
+          </a:effectRef>
+          <a:fontRef idx="minor">
+            <a:schemeClr val="tx1"/>
+          </a:fontRef>
+        </p:style>
+      </p:cxnSp>
+      <p:cxnSp>
+        <p:nvCxnSpPr>
+          <p:cNvPr id="19" name="直接箭头连接符 18"/>
+          <p:cNvCxnSpPr/>
+          <p:nvPr/>
+        </p:nvCxnSpPr>
+        <p:spPr>
+          <a:xfrm>
+            <a:off x="1769148" y="3084820"/>
+            <a:ext cx="0" cy="392430"/>
+          </a:xfrm>
+          <a:prstGeom prst="straightConnector1">
+            <a:avLst/>
+          </a:prstGeom>
+          <a:ln w="19050">
+            <a:solidFill>
+              <a:srgbClr val="10739E"/>
+            </a:solidFill>
+            <a:tailEnd type="triangle"/>
+          </a:ln>
+        </p:spPr>
+        <p:style>
+          <a:lnRef idx="1">
+            <a:schemeClr val="accent1"/>
+          </a:lnRef>
+          <a:fillRef idx="0">
+            <a:schemeClr val="accent1"/>
+          </a:fillRef>
+          <a:effectRef idx="0">
+            <a:schemeClr val="accent1"/>
+          </a:effectRef>
+          <a:fontRef idx="minor">
+            <a:schemeClr val="tx1"/>
+          </a:fontRef>
+        </p:style>
+      </p:cxnSp>
+      <p:sp>
+        <p:nvSpPr>
+          <p:cNvPr id="21" name="圆角矩形 20"/>
+          <p:cNvSpPr/>
+          <p:nvPr/>
+        </p:nvSpPr>
+        <p:spPr>
+          <a:xfrm>
+            <a:off x="1131360" y="4223959"/>
+            <a:ext cx="1275963" cy="354431"/>
+          </a:xfrm>
+          <a:prstGeom prst="roundRect">
+            <a:avLst/>
+          </a:prstGeom>
+          <a:solidFill>
+            <a:srgbClr val="FFF2CC"/>
+          </a:solidFill>
+          <a:ln w="25400" cap="flat" cmpd="sng">
+            <a:solidFill>
+              <a:schemeClr val="bg1">
+                <a:lumMod val="50000"/>
+              </a:schemeClr>
+            </a:solidFill>
+            <a:prstDash val="solid"/>
+            <a:round/>
+          </a:ln>
+        </p:spPr>
+        <p:style>
+          <a:lnRef idx="2">
+            <a:schemeClr val="accent1">
+              <a:shade val="50000"/>
+            </a:schemeClr>
+          </a:lnRef>
+          <a:fillRef idx="1">
+            <a:schemeClr val="accent1"/>
+          </a:fillRef>
+          <a:effectRef idx="0">
+            <a:schemeClr val="accent1"/>
+          </a:effectRef>
+          <a:fontRef idx="minor">
+            <a:schemeClr val="lt1"/>
+          </a:fontRef>
+        </p:style>
+        <p:txBody>
+          <a:bodyPr rtlCol="0" anchor="ctr"/>
+          <a:lstStyle/>
+          <a:p>
+            <a:pPr algn="ctr"/>
+            <a:r>
+              <a:rPr lang="zh-CN" altLang="en-US" b="1">
+                <a:solidFill>
+                  <a:schemeClr val="tx1"/>
+                </a:solidFill>
+              </a:rPr>
+              <a:t>传感器询问</a:t>
+            </a:r>
+            <a:endParaRPr lang="zh-CN" altLang="en-US" b="1">
+              <a:solidFill>
+                <a:schemeClr val="tx1"/>
+              </a:solidFill>
+            </a:endParaRPr>
+          </a:p>
+        </p:txBody>
+      </p:sp>
+      <p:cxnSp>
+        <p:nvCxnSpPr>
+          <p:cNvPr id="22" name="直接箭头连接符 21"/>
+          <p:cNvCxnSpPr/>
+          <p:nvPr/>
+        </p:nvCxnSpPr>
+        <p:spPr>
+          <a:xfrm>
+            <a:off x="1734858" y="3831580"/>
+            <a:ext cx="0" cy="392430"/>
+          </a:xfrm>
+          <a:prstGeom prst="straightConnector1">
+            <a:avLst/>
+          </a:prstGeom>
+          <a:ln w="19050">
+            <a:solidFill>
+              <a:srgbClr val="10739E"/>
+            </a:solidFill>
+            <a:tailEnd type="triangle"/>
+          </a:ln>
+        </p:spPr>
+        <p:style>
+          <a:lnRef idx="1">
+            <a:schemeClr val="accent1"/>
+          </a:lnRef>
+          <a:fillRef idx="0">
+            <a:schemeClr val="accent1"/>
+          </a:fillRef>
+          <a:effectRef idx="0">
+            <a:schemeClr val="accent1"/>
+          </a:effectRef>
+          <a:fontRef idx="minor">
+            <a:schemeClr val="tx1"/>
+          </a:fontRef>
+        </p:style>
+      </p:cxnSp>
+      <p:sp>
+        <p:nvSpPr>
+          <p:cNvPr id="39" name="圆角矩形 38"/>
+          <p:cNvSpPr/>
+          <p:nvPr/>
+        </p:nvSpPr>
+        <p:spPr>
+          <a:xfrm>
+            <a:off x="3178175" y="677545"/>
+            <a:ext cx="2223135" cy="4133850"/>
+          </a:xfrm>
+          <a:prstGeom prst="roundRect">
+            <a:avLst>
+              <a:gd name="adj" fmla="val 8967"/>
+            </a:avLst>
+          </a:prstGeom>
+          <a:solidFill>
+            <a:srgbClr val="FFE6CC"/>
+          </a:solidFill>
+          <a:ln>
+            <a:solidFill>
+              <a:schemeClr val="bg1"/>
+            </a:solidFill>
+          </a:ln>
+        </p:spPr>
+        <p:style>
+          <a:lnRef idx="2">
+            <a:schemeClr val="accent1">
+              <a:shade val="50000"/>
+            </a:schemeClr>
+          </a:lnRef>
+          <a:fillRef idx="1">
+            <a:schemeClr val="accent1"/>
+          </a:fillRef>
+          <a:effectRef idx="0">
+            <a:schemeClr val="accent1"/>
+          </a:effectRef>
+          <a:fontRef idx="minor">
+            <a:schemeClr val="lt1"/>
+          </a:fontRef>
+        </p:style>
+        <p:txBody>
+          <a:bodyPr rtlCol="0" anchor="ctr"/>
+          <a:lstStyle/>
+          <a:p>
+            <a:pPr algn="ctr"/>
+            <a:endParaRPr lang="zh-CN" altLang="en-US" b="1">
+              <a:solidFill>
+                <a:schemeClr val="tx1"/>
+              </a:solidFill>
+            </a:endParaRPr>
+          </a:p>
+        </p:txBody>
+      </p:sp>
+      <p:sp>
+        <p:nvSpPr>
+          <p:cNvPr id="75" name="圆角矩形 74"/>
+          <p:cNvSpPr/>
+          <p:nvPr/>
+        </p:nvSpPr>
+        <p:spPr>
+          <a:xfrm>
+            <a:off x="3251835" y="1591310"/>
+            <a:ext cx="1882775" cy="2309495"/>
+          </a:xfrm>
+          <a:prstGeom prst="roundRect">
+            <a:avLst>
+              <a:gd name="adj" fmla="val 4282"/>
+            </a:avLst>
+          </a:prstGeom>
+          <a:solidFill>
+            <a:srgbClr val="DAE8FC"/>
+          </a:solidFill>
+          <a:ln w="25400" cap="flat" cmpd="sng">
+            <a:solidFill>
+              <a:srgbClr val="C00000"/>
+            </a:solidFill>
+            <a:prstDash val="solid"/>
+            <a:round/>
+          </a:ln>
+        </p:spPr>
+        <p:style>
+          <a:lnRef idx="2">
+            <a:schemeClr val="accent1">
+              <a:shade val="50000"/>
+            </a:schemeClr>
+          </a:lnRef>
+          <a:fillRef idx="1">
+            <a:schemeClr val="accent1"/>
+          </a:fillRef>
+          <a:effectRef idx="0">
+            <a:schemeClr val="accent1"/>
+          </a:effectRef>
+          <a:fontRef idx="minor">
+            <a:schemeClr val="lt1"/>
+          </a:fontRef>
+        </p:style>
+        <p:txBody>
+          <a:bodyPr rtlCol="0" anchor="ctr"/>
+          <a:lstStyle/>
+          <a:p>
+            <a:pPr algn="ctr"/>
+            <a:endParaRPr lang="zh-CN" altLang="en-US" b="1">
+              <a:solidFill>
+                <a:schemeClr val="tx1"/>
+              </a:solidFill>
+            </a:endParaRPr>
+          </a:p>
+        </p:txBody>
+      </p:sp>
+      <p:sp>
+        <p:nvSpPr>
+          <p:cNvPr id="40" name="圆角矩形 39"/>
+          <p:cNvSpPr/>
+          <p:nvPr/>
+        </p:nvSpPr>
+        <p:spPr>
+          <a:xfrm>
+            <a:off x="3314700" y="1646555"/>
+            <a:ext cx="993775" cy="464820"/>
+          </a:xfrm>
+          <a:prstGeom prst="roundRect">
+            <a:avLst/>
+          </a:prstGeom>
+          <a:solidFill>
+            <a:srgbClr val="DAE8FC"/>
+          </a:solidFill>
+          <a:ln w="25400" cap="flat" cmpd="sng">
+            <a:solidFill>
+              <a:schemeClr val="bg1">
+                <a:lumMod val="50000"/>
+              </a:schemeClr>
+            </a:solidFill>
+            <a:prstDash val="solid"/>
+            <a:round/>
+          </a:ln>
+        </p:spPr>
+        <p:style>
+          <a:lnRef idx="2">
+            <a:schemeClr val="accent1">
+              <a:shade val="50000"/>
+            </a:schemeClr>
+          </a:lnRef>
+          <a:fillRef idx="1">
+            <a:schemeClr val="accent1"/>
+          </a:fillRef>
+          <a:effectRef idx="0">
+            <a:schemeClr val="accent1"/>
+          </a:effectRef>
+          <a:fontRef idx="minor">
+            <a:schemeClr val="lt1"/>
+          </a:fontRef>
+        </p:style>
+        <p:txBody>
+          <a:bodyPr rtlCol="0" anchor="ctr"/>
+          <a:lstStyle/>
+          <a:p>
+            <a:pPr algn="ctr"/>
+            <a:r>
+              <a:rPr lang="zh-CN" altLang="en-US" b="1">
+                <a:solidFill>
+                  <a:srgbClr val="C00000"/>
+                </a:solidFill>
+              </a:rPr>
+              <a:t>福森动力学模型</a:t>
+            </a:r>
+            <a:endParaRPr lang="zh-CN" altLang="en-US" b="1">
+              <a:solidFill>
+                <a:srgbClr val="C00000"/>
+              </a:solidFill>
+            </a:endParaRPr>
+          </a:p>
+        </p:txBody>
+      </p:sp>
+      <p:sp>
+        <p:nvSpPr>
+          <p:cNvPr id="42" name="文本框 41"/>
+          <p:cNvSpPr txBox="1"/>
+          <p:nvPr/>
+        </p:nvSpPr>
+        <p:spPr>
+          <a:xfrm>
+            <a:off x="3491230" y="316865"/>
+            <a:ext cx="1582420" cy="337185"/>
+          </a:xfrm>
+          <a:prstGeom prst="rect">
+            <a:avLst/>
+          </a:prstGeom>
+          <a:noFill/>
+        </p:spPr>
+        <p:txBody>
+          <a:bodyPr wrap="square" rtlCol="0">
+            <a:spAutoFit/>
+          </a:bodyPr>
+          <a:lstStyle/>
+          <a:p>
+            <a:pPr algn="ctr"/>
+            <a:r>
+              <a:rPr lang="en-US" sz="1600" b="1" dirty="0">
+                <a:solidFill>
+                  <a:schemeClr val="tx1"/>
+                </a:solidFill>
+              </a:rPr>
+              <a:t>Python </a:t>
+            </a:r>
+            <a:r>
+              <a:rPr lang="zh-CN" altLang="en-US" sz="1600" b="1" dirty="0">
+                <a:solidFill>
+                  <a:schemeClr val="tx1"/>
+                </a:solidFill>
+                <a:ea typeface="宋体" panose="02010600030101010101" pitchFamily="2" charset="-122"/>
+              </a:rPr>
+              <a:t>客户端</a:t>
+            </a:r>
+            <a:endParaRPr lang="zh-CN" altLang="en-US" sz="1600" b="1" dirty="0">
+              <a:solidFill>
+                <a:schemeClr val="tx1"/>
+              </a:solidFill>
+              <a:ea typeface="宋体" panose="02010600030101010101" pitchFamily="2" charset="-122"/>
+            </a:endParaRPr>
+          </a:p>
+        </p:txBody>
+      </p:sp>
+      <p:sp>
+        <p:nvSpPr>
+          <p:cNvPr id="54" name="圆角矩形 53"/>
+          <p:cNvSpPr/>
+          <p:nvPr/>
+        </p:nvSpPr>
+        <p:spPr>
+          <a:xfrm>
+            <a:off x="5698490" y="677545"/>
+            <a:ext cx="2223135" cy="4133850"/>
+          </a:xfrm>
+          <a:prstGeom prst="roundRect">
+            <a:avLst>
+              <a:gd name="adj" fmla="val 8967"/>
+            </a:avLst>
+          </a:prstGeom>
+          <a:solidFill>
+            <a:srgbClr val="D5E8D4"/>
+          </a:solidFill>
+          <a:ln>
+            <a:solidFill>
+              <a:schemeClr val="bg1"/>
+            </a:solidFill>
+          </a:ln>
+        </p:spPr>
+        <p:style>
+          <a:lnRef idx="2">
+            <a:schemeClr val="accent1">
+              <a:shade val="50000"/>
+            </a:schemeClr>
+          </a:lnRef>
+          <a:fillRef idx="1">
+            <a:schemeClr val="accent1"/>
+          </a:fillRef>
+          <a:effectRef idx="0">
+            <a:schemeClr val="accent1"/>
+          </a:effectRef>
+          <a:fontRef idx="minor">
+            <a:schemeClr val="lt1"/>
+          </a:fontRef>
+        </p:style>
+        <p:txBody>
+          <a:bodyPr rtlCol="0" anchor="ctr"/>
+          <a:lstStyle/>
+          <a:p>
+            <a:pPr algn="ctr"/>
+            <a:endParaRPr lang="zh-CN" altLang="en-US" b="1">
+              <a:solidFill>
+                <a:schemeClr val="tx1"/>
+              </a:solidFill>
+            </a:endParaRPr>
+          </a:p>
+        </p:txBody>
+      </p:sp>
+      <p:sp>
+        <p:nvSpPr>
+          <p:cNvPr id="55" name="圆角矩形 54"/>
+          <p:cNvSpPr/>
+          <p:nvPr/>
+        </p:nvSpPr>
+        <p:spPr>
+          <a:xfrm>
+            <a:off x="6137275" y="3038475"/>
+            <a:ext cx="1471930" cy="981710"/>
+          </a:xfrm>
+          <a:prstGeom prst="roundRect">
+            <a:avLst/>
+          </a:prstGeom>
+          <a:solidFill>
+            <a:srgbClr val="D5E8D4"/>
+          </a:solidFill>
+          <a:ln w="25400" cap="flat" cmpd="sng">
+            <a:solidFill>
+              <a:schemeClr val="bg1">
+                <a:lumMod val="50000"/>
+              </a:schemeClr>
+            </a:solidFill>
+            <a:prstDash val="solid"/>
+            <a:round/>
+          </a:ln>
+        </p:spPr>
+        <p:style>
+          <a:lnRef idx="2">
+            <a:schemeClr val="accent1">
+              <a:shade val="50000"/>
+            </a:schemeClr>
+          </a:lnRef>
+          <a:fillRef idx="1">
+            <a:schemeClr val="accent1"/>
+          </a:fillRef>
+          <a:effectRef idx="0">
+            <a:schemeClr val="accent1"/>
+          </a:effectRef>
+          <a:fontRef idx="minor">
+            <a:schemeClr val="lt1"/>
+          </a:fontRef>
+        </p:style>
+        <p:txBody>
+          <a:bodyPr rtlCol="0" anchor="ctr"/>
+          <a:lstStyle/>
+          <a:p>
+            <a:pPr algn="ctr"/>
+            <a:r>
+              <a:rPr lang="en-US" altLang="zh-CN" b="1">
+                <a:solidFill>
+                  <a:schemeClr val="tx1"/>
+                </a:solidFill>
+              </a:rPr>
+              <a:t>ROS2 </a:t>
+            </a:r>
+            <a:r>
+              <a:rPr lang="zh-CN" altLang="en-US" b="1">
+                <a:solidFill>
+                  <a:srgbClr val="C00000"/>
+                </a:solidFill>
+              </a:rPr>
+              <a:t>主题</a:t>
+            </a:r>
+            <a:r>
+              <a:rPr lang="zh-CN" altLang="en-US" b="1">
+                <a:solidFill>
+                  <a:schemeClr val="tx1"/>
+                </a:solidFill>
+              </a:rPr>
+              <a:t>：</a:t>
+            </a:r>
+            <a:endParaRPr lang="zh-CN" altLang="en-US" b="1">
+              <a:solidFill>
+                <a:schemeClr val="tx1"/>
+              </a:solidFill>
+            </a:endParaRPr>
+          </a:p>
+          <a:p>
+            <a:pPr algn="ctr"/>
+            <a:r>
+              <a:rPr lang="zh-CN" altLang="en-US" b="1">
+                <a:solidFill>
+                  <a:schemeClr val="tx1"/>
+                </a:solidFill>
+              </a:rPr>
+              <a:t>传感器数据</a:t>
+            </a:r>
+            <a:endParaRPr lang="zh-CN" altLang="en-US" b="1">
+              <a:solidFill>
+                <a:schemeClr val="tx1"/>
+              </a:solidFill>
+            </a:endParaRPr>
+          </a:p>
+          <a:p>
+            <a:pPr algn="ctr"/>
+            <a:r>
+              <a:rPr lang="zh-CN" altLang="en-US" b="1">
+                <a:solidFill>
+                  <a:schemeClr val="tx1"/>
+                </a:solidFill>
+              </a:rPr>
+              <a:t>（传感器消息，几何消息）</a:t>
+            </a:r>
+            <a:endParaRPr lang="zh-CN" altLang="en-US" b="1">
+              <a:solidFill>
+                <a:schemeClr val="tx1"/>
+              </a:solidFill>
+            </a:endParaRPr>
+          </a:p>
+        </p:txBody>
+      </p:sp>
+      <p:sp>
+        <p:nvSpPr>
+          <p:cNvPr id="56" name="文本框 55"/>
+          <p:cNvSpPr txBox="1"/>
+          <p:nvPr/>
+        </p:nvSpPr>
+        <p:spPr>
+          <a:xfrm>
+            <a:off x="6067210" y="316748"/>
+            <a:ext cx="1393717" cy="337185"/>
+          </a:xfrm>
+          <a:prstGeom prst="rect">
+            <a:avLst/>
+          </a:prstGeom>
+          <a:noFill/>
+        </p:spPr>
+        <p:txBody>
+          <a:bodyPr wrap="square" rtlCol="0">
+            <a:spAutoFit/>
+          </a:bodyPr>
+          <a:lstStyle/>
+          <a:p>
+            <a:pPr algn="ctr"/>
+            <a:r>
+              <a:rPr lang="en-US" sz="1600" b="1" dirty="0">
+                <a:solidFill>
+                  <a:schemeClr val="tx1"/>
+                </a:solidFill>
+              </a:rPr>
+              <a:t>ROS 2</a:t>
+            </a:r>
+            <a:endParaRPr lang="en-US" sz="1600" b="1" dirty="0">
+              <a:solidFill>
+                <a:schemeClr val="tx1"/>
+              </a:solidFill>
+              <a:ea typeface="宋体" panose="02010600030101010101" pitchFamily="2" charset="-122"/>
+            </a:endParaRPr>
+          </a:p>
+        </p:txBody>
+      </p:sp>
+      <p:sp>
+        <p:nvSpPr>
+          <p:cNvPr id="68" name="圆角矩形 67"/>
+          <p:cNvSpPr/>
+          <p:nvPr/>
+        </p:nvSpPr>
+        <p:spPr>
+          <a:xfrm>
+            <a:off x="3870325" y="2484755"/>
+            <a:ext cx="1139190" cy="464820"/>
+          </a:xfrm>
+          <a:prstGeom prst="roundRect">
+            <a:avLst/>
+          </a:prstGeom>
+          <a:solidFill>
+            <a:srgbClr val="DAE8FC"/>
+          </a:solidFill>
+          <a:ln w="25400" cap="flat" cmpd="sng">
+            <a:solidFill>
+              <a:schemeClr val="bg1">
+                <a:lumMod val="50000"/>
+              </a:schemeClr>
+            </a:solidFill>
+            <a:prstDash val="solid"/>
+            <a:round/>
+          </a:ln>
+        </p:spPr>
+        <p:style>
+          <a:lnRef idx="2">
+            <a:schemeClr val="accent1">
+              <a:shade val="50000"/>
+            </a:schemeClr>
+          </a:lnRef>
+          <a:fillRef idx="1">
+            <a:schemeClr val="accent1"/>
+          </a:fillRef>
+          <a:effectRef idx="0">
+            <a:schemeClr val="accent1"/>
+          </a:effectRef>
+          <a:fontRef idx="minor">
+            <a:schemeClr val="lt1"/>
+          </a:fontRef>
+        </p:style>
+        <p:txBody>
+          <a:bodyPr rtlCol="0" anchor="ctr"/>
+          <a:lstStyle/>
+          <a:p>
+            <a:pPr algn="ctr"/>
+            <a:r>
+              <a:rPr lang="zh-CN" altLang="en-US" b="1">
+                <a:solidFill>
+                  <a:schemeClr val="tx1"/>
+                </a:solidFill>
+              </a:rPr>
+              <a:t>控制面</a:t>
+            </a:r>
+            <a:endParaRPr lang="zh-CN" altLang="en-US" b="1">
+              <a:solidFill>
+                <a:schemeClr val="tx1"/>
+              </a:solidFill>
+            </a:endParaRPr>
+          </a:p>
+          <a:p>
+            <a:pPr algn="ctr"/>
+            <a:r>
+              <a:rPr lang="zh-CN" altLang="en-US" b="1">
+                <a:solidFill>
+                  <a:schemeClr val="tx1"/>
+                </a:solidFill>
+              </a:rPr>
+              <a:t>动力学</a:t>
+            </a:r>
+            <a:endParaRPr lang="zh-CN" altLang="en-US" b="1">
+              <a:solidFill>
+                <a:schemeClr val="tx1"/>
+              </a:solidFill>
+            </a:endParaRPr>
+          </a:p>
+        </p:txBody>
+      </p:sp>
+      <p:sp>
+        <p:nvSpPr>
+          <p:cNvPr id="69" name="圆角矩形 68"/>
+          <p:cNvSpPr/>
+          <p:nvPr/>
+        </p:nvSpPr>
+        <p:spPr>
+          <a:xfrm>
+            <a:off x="3870325" y="3296920"/>
+            <a:ext cx="1139190" cy="464820"/>
+          </a:xfrm>
+          <a:prstGeom prst="roundRect">
+            <a:avLst/>
+          </a:prstGeom>
+          <a:solidFill>
+            <a:srgbClr val="DAE8FC"/>
+          </a:solidFill>
+          <a:ln w="25400" cap="flat" cmpd="sng">
+            <a:solidFill>
+              <a:schemeClr val="bg1">
+                <a:lumMod val="50000"/>
+              </a:schemeClr>
+            </a:solidFill>
+            <a:prstDash val="solid"/>
+            <a:round/>
+          </a:ln>
+        </p:spPr>
+        <p:style>
+          <a:lnRef idx="2">
+            <a:schemeClr val="accent1">
+              <a:shade val="50000"/>
+            </a:schemeClr>
+          </a:lnRef>
+          <a:fillRef idx="1">
+            <a:schemeClr val="accent1"/>
+          </a:fillRef>
+          <a:effectRef idx="0">
+            <a:schemeClr val="accent1"/>
+          </a:effectRef>
+          <a:fontRef idx="minor">
+            <a:schemeClr val="lt1"/>
+          </a:fontRef>
+        </p:style>
+        <p:txBody>
+          <a:bodyPr rtlCol="0" anchor="ctr"/>
+          <a:lstStyle/>
+          <a:p>
+            <a:pPr algn="ctr"/>
+            <a:r>
+              <a:rPr lang="en-US" altLang="zh-CN" b="1">
+                <a:solidFill>
+                  <a:schemeClr val="tx1"/>
+                </a:solidFill>
+              </a:rPr>
+              <a:t>HSD </a:t>
+            </a:r>
+            <a:endParaRPr lang="en-US" altLang="zh-CN" b="1">
+              <a:solidFill>
+                <a:schemeClr val="tx1"/>
+              </a:solidFill>
+            </a:endParaRPr>
+          </a:p>
+          <a:p>
+            <a:pPr algn="ctr"/>
+            <a:r>
+              <a:rPr lang="zh-CN" altLang="en-US" b="1">
+                <a:solidFill>
+                  <a:schemeClr val="tx1"/>
+                </a:solidFill>
+              </a:rPr>
+              <a:t>控制器</a:t>
+            </a:r>
+            <a:endParaRPr lang="zh-CN" altLang="en-US" b="1">
+              <a:solidFill>
+                <a:schemeClr val="tx1"/>
+              </a:solidFill>
+            </a:endParaRPr>
+          </a:p>
+        </p:txBody>
+      </p:sp>
+      <p:sp>
+        <p:nvSpPr>
+          <p:cNvPr id="70" name="圆角矩形 69"/>
+          <p:cNvSpPr/>
+          <p:nvPr/>
+        </p:nvSpPr>
+        <p:spPr>
+          <a:xfrm>
+            <a:off x="3991610" y="4165600"/>
+            <a:ext cx="1315720" cy="469265"/>
+          </a:xfrm>
+          <a:prstGeom prst="roundRect">
+            <a:avLst/>
+          </a:prstGeom>
+          <a:solidFill>
+            <a:srgbClr val="FFE6CC"/>
+          </a:solidFill>
+          <a:ln w="25400" cap="flat" cmpd="sng">
+            <a:solidFill>
+              <a:schemeClr val="bg1">
+                <a:lumMod val="50000"/>
+              </a:schemeClr>
+            </a:solidFill>
+            <a:prstDash val="solid"/>
+            <a:round/>
+          </a:ln>
+        </p:spPr>
+        <p:style>
+          <a:lnRef idx="2">
+            <a:schemeClr val="accent1">
+              <a:shade val="50000"/>
+            </a:schemeClr>
+          </a:lnRef>
+          <a:fillRef idx="1">
+            <a:schemeClr val="accent1"/>
+          </a:fillRef>
+          <a:effectRef idx="0">
+            <a:schemeClr val="accent1"/>
+          </a:effectRef>
+          <a:fontRef idx="minor">
+            <a:schemeClr val="lt1"/>
+          </a:fontRef>
+        </p:style>
+        <p:txBody>
+          <a:bodyPr rtlCol="0" anchor="ctr"/>
+          <a:lstStyle/>
+          <a:p>
+            <a:pPr algn="ctr"/>
+            <a:r>
+              <a:rPr lang="zh-CN" b="1">
+                <a:solidFill>
+                  <a:srgbClr val="C00000"/>
+                </a:solidFill>
+              </a:rPr>
+              <a:t>传感器数据</a:t>
+            </a:r>
+            <a:endParaRPr lang="zh-CN" b="1">
+              <a:solidFill>
+                <a:schemeClr val="tx1"/>
+              </a:solidFill>
+            </a:endParaRPr>
+          </a:p>
+          <a:p>
+            <a:pPr algn="ctr"/>
+            <a:r>
+              <a:rPr lang="zh-CN" b="1">
+                <a:solidFill>
+                  <a:srgbClr val="C00000"/>
+                </a:solidFill>
+              </a:rPr>
+              <a:t>发布者</a:t>
+            </a:r>
+            <a:r>
+              <a:rPr lang="en-US" altLang="zh-CN" b="1">
+                <a:solidFill>
+                  <a:schemeClr val="tx1"/>
+                </a:solidFill>
+              </a:rPr>
+              <a:t> ROS2</a:t>
+            </a:r>
+            <a:endParaRPr lang="en-US" altLang="zh-CN" b="1">
+              <a:solidFill>
+                <a:schemeClr val="tx1"/>
+              </a:solidFill>
+            </a:endParaRPr>
+          </a:p>
+        </p:txBody>
+      </p:sp>
+      <p:sp>
+        <p:nvSpPr>
+          <p:cNvPr id="71" name="圆角矩形 70"/>
+          <p:cNvSpPr/>
+          <p:nvPr/>
+        </p:nvSpPr>
+        <p:spPr>
+          <a:xfrm>
+            <a:off x="4203700" y="832485"/>
+            <a:ext cx="1139190" cy="464820"/>
+          </a:xfrm>
+          <a:prstGeom prst="roundRect">
+            <a:avLst/>
+          </a:prstGeom>
+          <a:solidFill>
+            <a:srgbClr val="FFE6CC"/>
+          </a:solidFill>
+          <a:ln w="25400" cap="flat" cmpd="sng">
+            <a:solidFill>
+              <a:schemeClr val="bg1">
+                <a:lumMod val="50000"/>
+              </a:schemeClr>
+            </a:solidFill>
+            <a:prstDash val="solid"/>
+            <a:round/>
+          </a:ln>
+        </p:spPr>
+        <p:style>
+          <a:lnRef idx="2">
+            <a:schemeClr val="accent1">
+              <a:shade val="50000"/>
+            </a:schemeClr>
+          </a:lnRef>
+          <a:fillRef idx="1">
+            <a:schemeClr val="accent1"/>
+          </a:fillRef>
+          <a:effectRef idx="0">
+            <a:schemeClr val="accent1"/>
+          </a:effectRef>
+          <a:fontRef idx="minor">
+            <a:schemeClr val="lt1"/>
+          </a:fontRef>
+        </p:style>
+        <p:txBody>
+          <a:bodyPr rtlCol="0" anchor="ctr"/>
+          <a:lstStyle/>
+          <a:p>
+            <a:pPr algn="ctr"/>
+            <a:r>
+              <a:rPr lang="en-US" altLang="zh-CN" b="1">
+                <a:solidFill>
+                  <a:schemeClr val="tx1"/>
+                </a:solidFill>
+              </a:rPr>
+              <a:t>ROS2 </a:t>
+            </a:r>
+            <a:r>
+              <a:rPr lang="zh-CN" altLang="en-US" b="1">
+                <a:solidFill>
+                  <a:schemeClr val="tx1"/>
+                </a:solidFill>
+              </a:rPr>
+              <a:t>命令</a:t>
+            </a:r>
+            <a:r>
+              <a:rPr lang="zh-CN" altLang="en-US" b="1">
+                <a:solidFill>
+                  <a:srgbClr val="C00000"/>
+                </a:solidFill>
+              </a:rPr>
+              <a:t>订阅者</a:t>
+            </a:r>
+            <a:endParaRPr lang="zh-CN" altLang="en-US" b="1">
+              <a:solidFill>
+                <a:srgbClr val="C00000"/>
+              </a:solidFill>
+            </a:endParaRPr>
+          </a:p>
+        </p:txBody>
+      </p:sp>
+      <p:cxnSp>
+        <p:nvCxnSpPr>
+          <p:cNvPr id="72" name="直接箭头连接符 71"/>
+          <p:cNvCxnSpPr>
+            <a:stCxn id="21" idx="3"/>
+            <a:endCxn id="70" idx="1"/>
+          </p:cNvCxnSpPr>
+          <p:nvPr/>
+        </p:nvCxnSpPr>
+        <p:spPr>
+          <a:xfrm flipV="1">
+            <a:off x="2407285" y="4400550"/>
+            <a:ext cx="1584325" cy="635"/>
+          </a:xfrm>
+          <a:prstGeom prst="straightConnector1">
+            <a:avLst/>
+          </a:prstGeom>
+          <a:ln w="19050">
+            <a:solidFill>
+              <a:srgbClr val="10739E"/>
+            </a:solidFill>
+            <a:tailEnd type="arrow"/>
+          </a:ln>
+        </p:spPr>
+        <p:style>
+          <a:lnRef idx="1">
+            <a:schemeClr val="accent1"/>
+          </a:lnRef>
+          <a:fillRef idx="0">
+            <a:schemeClr val="accent1"/>
+          </a:fillRef>
+          <a:effectRef idx="0">
+            <a:schemeClr val="accent1"/>
+          </a:effectRef>
+          <a:fontRef idx="minor">
+            <a:schemeClr val="tx1"/>
+          </a:fontRef>
+        </p:style>
+      </p:cxnSp>
+      <p:cxnSp>
+        <p:nvCxnSpPr>
+          <p:cNvPr id="73" name="直接箭头连接符 72"/>
+          <p:cNvCxnSpPr/>
+          <p:nvPr/>
+        </p:nvCxnSpPr>
+        <p:spPr>
+          <a:xfrm flipH="1" flipV="1">
+            <a:off x="3481705" y="2117725"/>
+            <a:ext cx="7620" cy="2287270"/>
+          </a:xfrm>
+          <a:prstGeom prst="straightConnector1">
+            <a:avLst/>
+          </a:prstGeom>
+          <a:ln w="19050">
+            <a:solidFill>
+              <a:srgbClr val="10739E"/>
+            </a:solidFill>
+            <a:tailEnd type="arrow"/>
+          </a:ln>
+        </p:spPr>
+        <p:style>
+          <a:lnRef idx="1">
+            <a:schemeClr val="accent1"/>
+          </a:lnRef>
+          <a:fillRef idx="0">
+            <a:schemeClr val="accent1"/>
+          </a:fillRef>
+          <a:effectRef idx="0">
+            <a:schemeClr val="accent1"/>
+          </a:effectRef>
+          <a:fontRef idx="minor">
+            <a:schemeClr val="tx1"/>
+          </a:fontRef>
+        </p:style>
+      </p:cxnSp>
+      <p:sp>
+        <p:nvSpPr>
+          <p:cNvPr id="74" name="文本框 73"/>
+          <p:cNvSpPr txBox="1"/>
+          <p:nvPr/>
+        </p:nvSpPr>
+        <p:spPr>
+          <a:xfrm>
+            <a:off x="3437255" y="4378325"/>
+            <a:ext cx="551815" cy="368300"/>
+          </a:xfrm>
+          <a:prstGeom prst="rect">
+            <a:avLst/>
+          </a:prstGeom>
+          <a:noFill/>
+        </p:spPr>
+        <p:txBody>
+          <a:bodyPr wrap="square" rtlCol="0">
+            <a:spAutoFit/>
+          </a:bodyPr>
+          <a:lstStyle/>
+          <a:p>
+            <a:pPr algn="ctr"/>
+            <a:r>
+              <a:rPr lang="zh-CN" sz="900" b="1" dirty="0">
+                <a:solidFill>
+                  <a:schemeClr val="tx1"/>
+                </a:solidFill>
+                <a:ea typeface="宋体" panose="02010600030101010101" pitchFamily="2" charset="-122"/>
+              </a:rPr>
+              <a:t>传感器数据</a:t>
+            </a:r>
+            <a:endParaRPr lang="zh-CN" sz="900" b="1" dirty="0">
+              <a:solidFill>
+                <a:schemeClr val="tx1"/>
+              </a:solidFill>
+              <a:ea typeface="宋体" panose="02010600030101010101" pitchFamily="2" charset="-122"/>
+            </a:endParaRPr>
+          </a:p>
+        </p:txBody>
+      </p:sp>
+      <p:cxnSp>
+        <p:nvCxnSpPr>
+          <p:cNvPr id="76" name="肘形连接符 75"/>
+          <p:cNvCxnSpPr>
+            <a:stCxn id="68" idx="0"/>
+            <a:endCxn id="40" idx="3"/>
+          </p:cNvCxnSpPr>
+          <p:nvPr/>
+        </p:nvCxnSpPr>
+        <p:spPr>
+          <a:xfrm rot="16200000" flipV="1">
+            <a:off x="4071303" y="2116138"/>
+            <a:ext cx="605790" cy="131445"/>
+          </a:xfrm>
+          <a:prstGeom prst="bentConnector2">
+            <a:avLst/>
+          </a:prstGeom>
+          <a:ln w="19050">
+            <a:solidFill>
+              <a:srgbClr val="10739E"/>
+            </a:solidFill>
+            <a:tailEnd type="arrow"/>
+          </a:ln>
+        </p:spPr>
+        <p:style>
+          <a:lnRef idx="1">
+            <a:schemeClr val="accent1"/>
+          </a:lnRef>
+          <a:fillRef idx="0">
+            <a:schemeClr val="accent1"/>
+          </a:fillRef>
+          <a:effectRef idx="0">
+            <a:schemeClr val="accent1"/>
+          </a:effectRef>
+          <a:fontRef idx="minor">
+            <a:schemeClr val="tx1"/>
+          </a:fontRef>
+        </p:style>
+      </p:cxnSp>
+      <p:cxnSp>
+        <p:nvCxnSpPr>
+          <p:cNvPr id="77" name="直接箭头连接符 76"/>
+          <p:cNvCxnSpPr>
+            <a:stCxn id="69" idx="0"/>
+            <a:endCxn id="68" idx="2"/>
+          </p:cNvCxnSpPr>
+          <p:nvPr/>
+        </p:nvCxnSpPr>
+        <p:spPr>
+          <a:xfrm flipV="1">
+            <a:off x="4439920" y="2949575"/>
+            <a:ext cx="0" cy="347345"/>
+          </a:xfrm>
+          <a:prstGeom prst="straightConnector1">
+            <a:avLst/>
+          </a:prstGeom>
+          <a:ln w="19050">
+            <a:solidFill>
+              <a:srgbClr val="10739E"/>
+            </a:solidFill>
+            <a:tailEnd type="arrow"/>
+          </a:ln>
+        </p:spPr>
+        <p:style>
+          <a:lnRef idx="1">
+            <a:schemeClr val="accent1"/>
+          </a:lnRef>
+          <a:fillRef idx="0">
+            <a:schemeClr val="accent1"/>
+          </a:fillRef>
+          <a:effectRef idx="0">
+            <a:schemeClr val="accent1"/>
+          </a:effectRef>
+          <a:fontRef idx="minor">
+            <a:schemeClr val="tx1"/>
+          </a:fontRef>
+        </p:style>
+      </p:cxnSp>
+      <p:sp>
+        <p:nvSpPr>
+          <p:cNvPr id="78" name="文本框 77"/>
+          <p:cNvSpPr txBox="1"/>
+          <p:nvPr/>
+        </p:nvSpPr>
+        <p:spPr>
+          <a:xfrm>
+            <a:off x="3104515" y="3930650"/>
+            <a:ext cx="463550" cy="368300"/>
+          </a:xfrm>
+          <a:prstGeom prst="rect">
+            <a:avLst/>
+          </a:prstGeom>
+          <a:noFill/>
+        </p:spPr>
+        <p:txBody>
+          <a:bodyPr wrap="square" rtlCol="0">
+            <a:spAutoFit/>
+          </a:bodyPr>
+          <a:lstStyle/>
+          <a:p>
+            <a:pPr algn="ctr"/>
+            <a:r>
+              <a:rPr lang="zh-CN" sz="900" b="1" dirty="0">
+                <a:solidFill>
+                  <a:schemeClr val="tx1"/>
+                </a:solidFill>
+                <a:ea typeface="宋体" panose="02010600030101010101" pitchFamily="2" charset="-122"/>
+              </a:rPr>
+              <a:t>代理</a:t>
+            </a:r>
+            <a:endParaRPr lang="zh-CN" sz="900" b="1" dirty="0">
+              <a:solidFill>
+                <a:schemeClr val="tx1"/>
+              </a:solidFill>
+              <a:ea typeface="宋体" panose="02010600030101010101" pitchFamily="2" charset="-122"/>
+            </a:endParaRPr>
+          </a:p>
+          <a:p>
+            <a:pPr algn="ctr"/>
+            <a:r>
+              <a:rPr lang="zh-CN" sz="900" b="1" dirty="0">
+                <a:solidFill>
+                  <a:schemeClr val="tx1"/>
+                </a:solidFill>
+                <a:ea typeface="宋体" panose="02010600030101010101" pitchFamily="2" charset="-122"/>
+              </a:rPr>
+              <a:t>状态</a:t>
+            </a:r>
+            <a:endParaRPr lang="zh-CN" sz="900" b="1" dirty="0">
+              <a:solidFill>
+                <a:schemeClr val="tx1"/>
+              </a:solidFill>
+              <a:ea typeface="宋体" panose="02010600030101010101" pitchFamily="2" charset="-122"/>
+            </a:endParaRPr>
+          </a:p>
+        </p:txBody>
+      </p:sp>
+      <p:sp>
+        <p:nvSpPr>
+          <p:cNvPr id="79" name="圆角矩形 78"/>
+          <p:cNvSpPr/>
+          <p:nvPr/>
+        </p:nvSpPr>
+        <p:spPr>
+          <a:xfrm>
+            <a:off x="6136005" y="1421130"/>
+            <a:ext cx="1471930" cy="981710"/>
+          </a:xfrm>
+          <a:prstGeom prst="roundRect">
+            <a:avLst/>
+          </a:prstGeom>
+          <a:solidFill>
+            <a:srgbClr val="D5E8D4"/>
+          </a:solidFill>
+          <a:ln w="25400" cap="flat" cmpd="sng">
+            <a:solidFill>
+              <a:schemeClr val="bg1">
+                <a:lumMod val="50000"/>
+              </a:schemeClr>
+            </a:solidFill>
+            <a:prstDash val="solid"/>
+            <a:round/>
+          </a:ln>
+        </p:spPr>
+        <p:style>
+          <a:lnRef idx="2">
+            <a:schemeClr val="accent1">
+              <a:shade val="50000"/>
+            </a:schemeClr>
+          </a:lnRef>
+          <a:fillRef idx="1">
+            <a:schemeClr val="accent1"/>
+          </a:fillRef>
+          <a:effectRef idx="0">
+            <a:schemeClr val="accent1"/>
+          </a:effectRef>
+          <a:fontRef idx="minor">
+            <a:schemeClr val="lt1"/>
+          </a:fontRef>
+        </p:style>
+        <p:txBody>
+          <a:bodyPr rtlCol="0" anchor="ctr"/>
+          <a:lstStyle/>
+          <a:p>
+            <a:pPr algn="ctr"/>
+            <a:r>
+              <a:rPr lang="en-US" altLang="zh-CN" b="1">
+                <a:solidFill>
+                  <a:schemeClr val="tx1"/>
+                </a:solidFill>
+              </a:rPr>
+              <a:t>ROS2 </a:t>
+            </a:r>
+            <a:r>
+              <a:rPr lang="zh-CN" altLang="en-US" b="1">
+                <a:solidFill>
+                  <a:srgbClr val="C00000"/>
+                </a:solidFill>
+              </a:rPr>
+              <a:t>发布者</a:t>
+            </a:r>
+            <a:r>
+              <a:rPr lang="zh-CN" altLang="en-US" b="1">
+                <a:solidFill>
+                  <a:schemeClr val="tx1"/>
+                </a:solidFill>
+              </a:rPr>
+              <a:t>：</a:t>
+            </a:r>
+            <a:endParaRPr lang="zh-CN" altLang="en-US" b="1">
+              <a:solidFill>
+                <a:schemeClr val="tx1"/>
+              </a:solidFill>
+            </a:endParaRPr>
+          </a:p>
+          <a:p>
+            <a:pPr algn="ctr"/>
+            <a:r>
+              <a:rPr lang="zh-CN" altLang="en-US" b="1">
+                <a:solidFill>
+                  <a:schemeClr val="tx1"/>
+                </a:solidFill>
+              </a:rPr>
+              <a:t>命令行输入</a:t>
+            </a:r>
+            <a:endParaRPr lang="zh-CN" altLang="en-US" b="1">
+              <a:solidFill>
+                <a:schemeClr val="tx1"/>
+              </a:solidFill>
+            </a:endParaRPr>
+          </a:p>
+          <a:p>
+            <a:pPr algn="ctr"/>
+            <a:r>
+              <a:rPr lang="zh-CN" altLang="en-US" b="1">
+                <a:solidFill>
+                  <a:schemeClr val="tx1"/>
+                </a:solidFill>
+              </a:rPr>
+              <a:t>（</a:t>
+            </a:r>
+            <a:r>
+              <a:rPr lang="en-US" altLang="zh-CN" b="1">
+                <a:solidFill>
+                  <a:schemeClr val="tx1"/>
+                </a:solidFill>
+              </a:rPr>
+              <a:t>HoloOcean </a:t>
+            </a:r>
+            <a:r>
+              <a:rPr lang="zh-CN" altLang="en-US" b="1">
+                <a:solidFill>
+                  <a:schemeClr val="tx1"/>
+                </a:solidFill>
+              </a:rPr>
+              <a:t>接口）</a:t>
+            </a:r>
+            <a:endParaRPr lang="zh-CN" altLang="en-US" b="1">
+              <a:solidFill>
+                <a:schemeClr val="tx1"/>
+              </a:solidFill>
+            </a:endParaRPr>
+          </a:p>
+        </p:txBody>
+      </p:sp>
+      <p:cxnSp>
+        <p:nvCxnSpPr>
+          <p:cNvPr id="80" name="肘形连接符 79"/>
+          <p:cNvCxnSpPr>
+            <a:stCxn id="70" idx="3"/>
+            <a:endCxn id="55" idx="2"/>
+          </p:cNvCxnSpPr>
+          <p:nvPr/>
+        </p:nvCxnSpPr>
+        <p:spPr>
+          <a:xfrm flipV="1">
+            <a:off x="5307330" y="4020185"/>
+            <a:ext cx="1565910" cy="380365"/>
+          </a:xfrm>
+          <a:prstGeom prst="bentConnector2">
+            <a:avLst/>
+          </a:prstGeom>
+          <a:ln w="19050">
+            <a:solidFill>
+              <a:srgbClr val="10739E"/>
+            </a:solidFill>
+            <a:tailEnd type="arrow"/>
+          </a:ln>
+        </p:spPr>
+        <p:style>
+          <a:lnRef idx="1">
+            <a:schemeClr val="accent1"/>
+          </a:lnRef>
+          <a:fillRef idx="0">
+            <a:schemeClr val="accent1"/>
+          </a:fillRef>
+          <a:effectRef idx="0">
+            <a:schemeClr val="accent1"/>
+          </a:effectRef>
+          <a:fontRef idx="minor">
+            <a:schemeClr val="tx1"/>
+          </a:fontRef>
+        </p:style>
+      </p:cxnSp>
+      <p:cxnSp>
+        <p:nvCxnSpPr>
+          <p:cNvPr id="81" name="肘形连接符 80"/>
+          <p:cNvCxnSpPr>
+            <a:endCxn id="68" idx="3"/>
+          </p:cNvCxnSpPr>
+          <p:nvPr/>
+        </p:nvCxnSpPr>
+        <p:spPr>
+          <a:xfrm rot="5400000">
+            <a:off x="4408170" y="1917700"/>
+            <a:ext cx="1400810" cy="198120"/>
+          </a:xfrm>
+          <a:prstGeom prst="bentConnector2">
+            <a:avLst/>
+          </a:prstGeom>
+          <a:ln w="19050">
+            <a:solidFill>
+              <a:srgbClr val="10739E"/>
+            </a:solidFill>
+            <a:tailEnd type="arrow"/>
+          </a:ln>
+        </p:spPr>
+        <p:style>
+          <a:lnRef idx="1">
+            <a:schemeClr val="accent1"/>
+          </a:lnRef>
+          <a:fillRef idx="0">
+            <a:schemeClr val="accent1"/>
+          </a:fillRef>
+          <a:effectRef idx="0">
+            <a:schemeClr val="accent1"/>
+          </a:effectRef>
+          <a:fontRef idx="minor">
+            <a:schemeClr val="tx1"/>
+          </a:fontRef>
+        </p:style>
+      </p:cxnSp>
+      <p:cxnSp>
+        <p:nvCxnSpPr>
+          <p:cNvPr id="82" name="肘形连接符 81"/>
+          <p:cNvCxnSpPr>
+            <a:stCxn id="79" idx="0"/>
+            <a:endCxn id="71" idx="3"/>
+          </p:cNvCxnSpPr>
+          <p:nvPr/>
+        </p:nvCxnSpPr>
+        <p:spPr>
+          <a:xfrm rot="16200000" flipV="1">
+            <a:off x="5928995" y="478155"/>
+            <a:ext cx="356235" cy="1529080"/>
+          </a:xfrm>
+          <a:prstGeom prst="bentConnector2">
+            <a:avLst/>
+          </a:prstGeom>
+          <a:ln w="19050">
+            <a:solidFill>
+              <a:srgbClr val="10739E"/>
+            </a:solidFill>
+            <a:tailEnd type="arrow"/>
+          </a:ln>
+        </p:spPr>
+        <p:style>
+          <a:lnRef idx="1">
+            <a:schemeClr val="accent1"/>
+          </a:lnRef>
+          <a:fillRef idx="0">
+            <a:schemeClr val="accent1"/>
+          </a:fillRef>
+          <a:effectRef idx="0">
+            <a:schemeClr val="accent1"/>
+          </a:effectRef>
+          <a:fontRef idx="minor">
+            <a:schemeClr val="tx1"/>
+          </a:fontRef>
+        </p:style>
+      </p:cxnSp>
+      <p:cxnSp>
+        <p:nvCxnSpPr>
+          <p:cNvPr id="83" name="肘形连接符 82"/>
+          <p:cNvCxnSpPr>
+            <a:endCxn id="69" idx="3"/>
+          </p:cNvCxnSpPr>
+          <p:nvPr/>
+        </p:nvCxnSpPr>
+        <p:spPr>
+          <a:xfrm rot="5400000">
+            <a:off x="3992880" y="2312035"/>
+            <a:ext cx="2233930" cy="200660"/>
+          </a:xfrm>
+          <a:prstGeom prst="bentConnector2">
+            <a:avLst/>
+          </a:prstGeom>
+          <a:ln w="19050">
+            <a:solidFill>
+              <a:srgbClr val="10739E"/>
+            </a:solidFill>
+            <a:tailEnd type="arrow"/>
+          </a:ln>
+        </p:spPr>
+        <p:style>
+          <a:lnRef idx="1">
+            <a:schemeClr val="accent1"/>
+          </a:lnRef>
+          <a:fillRef idx="0">
+            <a:schemeClr val="accent1"/>
+          </a:fillRef>
+          <a:effectRef idx="0">
+            <a:schemeClr val="accent1"/>
+          </a:effectRef>
+          <a:fontRef idx="minor">
+            <a:schemeClr val="tx1"/>
+          </a:fontRef>
+        </p:style>
+      </p:cxnSp>
+      <p:sp>
+        <p:nvSpPr>
+          <p:cNvPr id="84" name="文本框 83"/>
+          <p:cNvSpPr txBox="1"/>
+          <p:nvPr/>
+        </p:nvSpPr>
+        <p:spPr>
+          <a:xfrm>
+            <a:off x="5843905" y="4435475"/>
+            <a:ext cx="1363980" cy="229870"/>
+          </a:xfrm>
+          <a:prstGeom prst="rect">
+            <a:avLst/>
+          </a:prstGeom>
+          <a:noFill/>
+        </p:spPr>
+        <p:txBody>
+          <a:bodyPr wrap="square" rtlCol="0">
+            <a:spAutoFit/>
+          </a:bodyPr>
+          <a:lstStyle/>
+          <a:p>
+            <a:pPr algn="ctr"/>
+            <a:r>
+              <a:rPr lang="en-US" altLang="zh-CN" sz="900" b="1" dirty="0">
+                <a:solidFill>
+                  <a:schemeClr val="tx1"/>
+                </a:solidFill>
+                <a:ea typeface="宋体" panose="02010600030101010101" pitchFamily="2" charset="-122"/>
+              </a:rPr>
+              <a:t>IMU</a:t>
+            </a:r>
+            <a:r>
+              <a:rPr lang="zh-CN" altLang="en-US" sz="900" b="1" dirty="0">
+                <a:solidFill>
+                  <a:schemeClr val="tx1"/>
+                </a:solidFill>
+                <a:ea typeface="宋体" panose="02010600030101010101" pitchFamily="2" charset="-122"/>
+              </a:rPr>
+              <a:t>、</a:t>
+            </a:r>
+            <a:r>
+              <a:rPr lang="en-US" altLang="zh-CN" sz="900" b="1" dirty="0">
+                <a:solidFill>
+                  <a:schemeClr val="tx1"/>
+                </a:solidFill>
+                <a:ea typeface="宋体" panose="02010600030101010101" pitchFamily="2" charset="-122"/>
+              </a:rPr>
+              <a:t>DVL</a:t>
+            </a:r>
+            <a:r>
+              <a:rPr lang="zh-CN" altLang="en-US" sz="900" b="1" dirty="0">
+                <a:solidFill>
+                  <a:schemeClr val="tx1"/>
+                </a:solidFill>
+                <a:ea typeface="宋体" panose="02010600030101010101" pitchFamily="2" charset="-122"/>
+              </a:rPr>
+              <a:t>、</a:t>
+            </a:r>
+            <a:r>
+              <a:rPr lang="en-US" altLang="zh-CN" sz="900" b="1" dirty="0">
+                <a:solidFill>
+                  <a:schemeClr val="tx1"/>
+                </a:solidFill>
+                <a:ea typeface="宋体" panose="02010600030101010101" pitchFamily="2" charset="-122"/>
+              </a:rPr>
+              <a:t>GPS</a:t>
+            </a:r>
+            <a:r>
+              <a:rPr lang="zh-CN" altLang="en-US" sz="900" b="1" dirty="0">
+                <a:solidFill>
+                  <a:schemeClr val="tx1"/>
+                </a:solidFill>
+                <a:ea typeface="宋体" panose="02010600030101010101" pitchFamily="2" charset="-122"/>
+              </a:rPr>
+              <a:t>等</a:t>
+            </a:r>
+            <a:endParaRPr lang="zh-CN" altLang="en-US" sz="900" b="1" dirty="0">
+              <a:solidFill>
+                <a:schemeClr val="tx1"/>
+              </a:solidFill>
+              <a:ea typeface="宋体" panose="02010600030101010101" pitchFamily="2" charset="-122"/>
+            </a:endParaRPr>
+          </a:p>
+        </p:txBody>
+      </p:sp>
+      <p:cxnSp>
+        <p:nvCxnSpPr>
+          <p:cNvPr id="85" name="肘形连接符 84"/>
+          <p:cNvCxnSpPr>
+            <a:stCxn id="40" idx="0"/>
+            <a:endCxn id="47" idx="3"/>
+          </p:cNvCxnSpPr>
+          <p:nvPr/>
+        </p:nvCxnSpPr>
+        <p:spPr>
+          <a:xfrm rot="16200000" flipV="1">
+            <a:off x="2993390" y="828040"/>
+            <a:ext cx="232410" cy="1404620"/>
+          </a:xfrm>
+          <a:prstGeom prst="bentConnector2">
+            <a:avLst/>
+          </a:prstGeom>
+          <a:ln w="19050">
+            <a:solidFill>
+              <a:srgbClr val="10739E"/>
+            </a:solidFill>
+            <a:tailEnd type="arrow"/>
+          </a:ln>
+        </p:spPr>
+        <p:style>
+          <a:lnRef idx="1">
+            <a:schemeClr val="accent1"/>
+          </a:lnRef>
+          <a:fillRef idx="0">
+            <a:schemeClr val="accent1"/>
+          </a:fillRef>
+          <a:effectRef idx="0">
+            <a:schemeClr val="accent1"/>
+          </a:effectRef>
+          <a:fontRef idx="minor">
+            <a:schemeClr val="tx1"/>
+          </a:fontRef>
+        </p:style>
+      </p:cxnSp>
+      <p:sp>
+        <p:nvSpPr>
+          <p:cNvPr id="86" name="文本框 85"/>
+          <p:cNvSpPr txBox="1"/>
+          <p:nvPr/>
+        </p:nvSpPr>
+        <p:spPr>
+          <a:xfrm>
+            <a:off x="3232785" y="1170305"/>
+            <a:ext cx="572135" cy="229870"/>
+          </a:xfrm>
+          <a:prstGeom prst="rect">
+            <a:avLst/>
+          </a:prstGeom>
+          <a:noFill/>
+        </p:spPr>
+        <p:txBody>
+          <a:bodyPr wrap="square" rtlCol="0">
+            <a:spAutoFit/>
+          </a:bodyPr>
+          <a:lstStyle/>
+          <a:p>
+            <a:pPr algn="ctr"/>
+            <a:r>
+              <a:rPr lang="zh-CN" altLang="en-US" sz="900" b="1" dirty="0">
+                <a:solidFill>
+                  <a:schemeClr val="tx1"/>
+                </a:solidFill>
+                <a:ea typeface="宋体" panose="02010600030101010101" pitchFamily="2" charset="-122"/>
+              </a:rPr>
+              <a:t>加速度</a:t>
+            </a:r>
+            <a:endParaRPr lang="zh-CN" altLang="en-US" sz="900" b="1" dirty="0">
+              <a:solidFill>
+                <a:schemeClr val="tx1"/>
+              </a:solidFill>
+              <a:ea typeface="宋体" panose="02010600030101010101" pitchFamily="2" charset="-122"/>
+            </a:endParaRPr>
+          </a:p>
+        </p:txBody>
+      </p:sp>
+      <p:sp>
+        <p:nvSpPr>
+          <p:cNvPr id="87" name="文本框 86"/>
+          <p:cNvSpPr txBox="1"/>
+          <p:nvPr/>
+        </p:nvSpPr>
+        <p:spPr>
+          <a:xfrm>
+            <a:off x="5780405" y="821055"/>
+            <a:ext cx="1219835" cy="229870"/>
+          </a:xfrm>
+          <a:prstGeom prst="rect">
+            <a:avLst/>
+          </a:prstGeom>
+          <a:noFill/>
+        </p:spPr>
+        <p:txBody>
+          <a:bodyPr wrap="square" rtlCol="0">
+            <a:spAutoFit/>
+          </a:bodyPr>
+          <a:lstStyle/>
+          <a:p>
+            <a:pPr algn="ctr"/>
+            <a:r>
+              <a:rPr lang="zh-CN" altLang="en-US" sz="900" b="1" dirty="0">
+                <a:solidFill>
+                  <a:schemeClr val="tx1"/>
+                </a:solidFill>
+                <a:ea typeface="宋体" panose="02010600030101010101" pitchFamily="2" charset="-122"/>
+              </a:rPr>
+              <a:t>控制面或</a:t>
+            </a:r>
+            <a:r>
+              <a:rPr lang="en-US" altLang="zh-CN" sz="900" b="1" dirty="0">
+                <a:solidFill>
+                  <a:schemeClr val="tx1"/>
+                </a:solidFill>
+                <a:ea typeface="宋体" panose="02010600030101010101" pitchFamily="2" charset="-122"/>
+              </a:rPr>
+              <a:t> HSD </a:t>
+            </a:r>
+            <a:r>
+              <a:rPr lang="zh-CN" altLang="en-US" sz="900" b="1" dirty="0">
+                <a:solidFill>
+                  <a:schemeClr val="tx1"/>
+                </a:solidFill>
+                <a:ea typeface="宋体" panose="02010600030101010101" pitchFamily="2" charset="-122"/>
+              </a:rPr>
+              <a:t>命令</a:t>
+            </a:r>
+            <a:endParaRPr lang="zh-CN" altLang="en-US" sz="900" b="1" dirty="0">
+              <a:solidFill>
+                <a:schemeClr val="tx1"/>
+              </a:solidFill>
+              <a:ea typeface="宋体" panose="02010600030101010101" pitchFamily="2" charset="-122"/>
+            </a:endParaRPr>
+          </a:p>
+        </p:txBody>
+      </p:sp>
+    </p:spTree>
+  </p:cSld>
+  <p:clrMapOvr>
+    <a:masterClrMapping/>
+  </p:clrMapOvr>
+</p:sld>
+</file>
+
 <file path=ppt/theme/theme1.xml><?xml version="1.0" encoding="utf-8"?>
 <a:theme xmlns:a="http://schemas.openxmlformats.org/drawingml/2006/main" name="Luxe">
   <a:themeElements>
@@ -32260,7 +34553,7 @@
       <a:spPr>
         <a:ln w="19050">
           <a:solidFill>
-            <a:schemeClr val="accent3"/>
+            <a:srgbClr val="10739E"/>
           </a:solidFill>
           <a:tailEnd type="triangle"/>
         </a:ln>
